--- a/Kickstarter_Project_Presentation.pptx
+++ b/Kickstarter_Project_Presentation.pptx
@@ -4276,8 +4276,8 @@
         </p:nvSpPr>
         <p:spPr>
           <a:xfrm>
-            <a:off x="1456903" y="4988583"/>
-            <a:ext cx="7001297" cy="4124206"/>
+            <a:off x="1371600" y="4732000"/>
+            <a:ext cx="7001297" cy="5278368"/>
           </a:xfrm>
           <a:prstGeom prst="rect">
             <a:avLst/>
@@ -4292,7 +4292,7 @@
             <a:endParaRPr lang="en-US" dirty="0"/>
           </a:p>
           <a:p>
-            <a:pPr marL="285750" lvl="0" indent="-285750">
+            <a:pPr marL="457200" indent="-457200">
               <a:buFont typeface="Arial" panose="020B0604020202020204" pitchFamily="34" charset="0"/>
               <a:buChar char="•"/>
             </a:pPr>
@@ -4303,11 +4303,11 @@
                 </a:solidFill>
                 <a:latin typeface="Montserrat" pitchFamily="2" charset="77"/>
               </a:rPr>
-              <a:t>Smaller funding goals → higher success</a:t>
-            </a:r>
-          </a:p>
-          <a:p>
-            <a:pPr marL="285750" lvl="0" indent="-285750">
+              <a:t>Smaller funding goals significantly improve success rates.</a:t>
+            </a:r>
+          </a:p>
+          <a:p>
+            <a:pPr marL="457200" indent="-457200">
               <a:buFont typeface="Arial" panose="020B0604020202020204" pitchFamily="34" charset="0"/>
               <a:buChar char="•"/>
             </a:pPr>
@@ -4318,11 +4318,11 @@
                 </a:solidFill>
                 <a:latin typeface="Montserrat" pitchFamily="2" charset="77"/>
               </a:rPr>
-              <a:t>Dance &amp; Theater → top-performing categories</a:t>
-            </a:r>
-          </a:p>
-          <a:p>
-            <a:pPr marL="285750" lvl="0" indent="-285750">
+              <a:t>Dance and Theater are the highest-performing categories.</a:t>
+            </a:r>
+          </a:p>
+          <a:p>
+            <a:pPr marL="457200" indent="-457200">
               <a:buFont typeface="Arial" panose="020B0604020202020204" pitchFamily="34" charset="0"/>
               <a:buChar char="•"/>
             </a:pPr>
@@ -4333,11 +4333,11 @@
                 </a:solidFill>
                 <a:latin typeface="Montserrat" pitchFamily="2" charset="77"/>
               </a:rPr>
-              <a:t>Projects started in the United States and UK have nearly double chances compared to Italy</a:t>
-            </a:r>
-          </a:p>
-          <a:p>
-            <a:pPr marL="285750" lvl="0" indent="-285750">
+              <a:t>Projects launched in the United States and United Kingdom have nearly twice the success rate of those in Italy.</a:t>
+            </a:r>
+          </a:p>
+          <a:p>
+            <a:pPr marL="457200" indent="-457200">
               <a:buFont typeface="Arial" panose="020B0604020202020204" pitchFamily="34" charset="0"/>
               <a:buChar char="•"/>
             </a:pPr>
@@ -4348,11 +4348,11 @@
                 </a:solidFill>
                 <a:latin typeface="Montserrat" pitchFamily="2" charset="77"/>
               </a:rPr>
-              <a:t>July and December are bad time to launch a project</a:t>
-            </a:r>
-          </a:p>
-          <a:p>
-            <a:pPr marL="285750" lvl="0" indent="-285750">
+              <a:t>July and December show the lowest success rates — poor months to launch.</a:t>
+            </a:r>
+          </a:p>
+          <a:p>
+            <a:pPr marL="457200" indent="-457200">
               <a:buFont typeface="Arial" panose="020B0604020202020204" pitchFamily="34" charset="0"/>
               <a:buChar char="•"/>
             </a:pPr>
@@ -4363,7 +4363,7 @@
                 </a:solidFill>
                 <a:latin typeface="Montserrat" pitchFamily="2" charset="77"/>
               </a:rPr>
-              <a:t>Funding Achieved (%) is the strongest predictor of success</a:t>
+              <a:t>Funding Achieved (%) is the strongest predictor of whether a campaign succeeds.</a:t>
             </a:r>
           </a:p>
         </p:txBody>
@@ -4382,7 +4382,7 @@
         </p:nvSpPr>
         <p:spPr>
           <a:xfrm>
-            <a:off x="1028700" y="2901877"/>
+            <a:off x="1014943" y="2324100"/>
             <a:ext cx="7124700" cy="833562"/>
           </a:xfrm>
           <a:prstGeom prst="rect">
@@ -4461,7 +4461,7 @@
         </p:nvSpPr>
         <p:spPr>
           <a:xfrm>
-            <a:off x="979383" y="4153138"/>
+            <a:off x="1014943" y="3683020"/>
             <a:ext cx="10190480" cy="523220"/>
           </a:xfrm>
           <a:prstGeom prst="rect">
@@ -4585,7 +4585,7 @@
         <p:spPr>
           <a:xfrm>
             <a:off x="1456903" y="4988583"/>
-            <a:ext cx="6696497" cy="3247043"/>
+            <a:ext cx="6696497" cy="3631763"/>
           </a:xfrm>
           <a:prstGeom prst="rect">
             <a:avLst/>
@@ -4611,7 +4611,7 @@
                 </a:solidFill>
                 <a:latin typeface="Montserrat" pitchFamily="2" charset="77"/>
               </a:rPr>
-              <a:t>Set a realistic funding goal</a:t>
+              <a:t>Set a realistic and achievable funding  goal</a:t>
             </a:r>
           </a:p>
           <a:p>
@@ -4626,7 +4626,7 @@
                 </a:solidFill>
                 <a:latin typeface="Montserrat" pitchFamily="2" charset="77"/>
               </a:rPr>
-              <a:t>Choose categories with higher performance (when possible)</a:t>
+              <a:t>Select high-performance categories when possible</a:t>
             </a:r>
           </a:p>
           <a:p>
@@ -4641,7 +4641,7 @@
                 </a:solidFill>
                 <a:latin typeface="Montserrat" pitchFamily="2" charset="77"/>
               </a:rPr>
-              <a:t>Engage your community early to build pre-launch support.</a:t>
+              <a:t>Engage your community early to build momentum before launch.</a:t>
             </a:r>
           </a:p>
           <a:p>
@@ -4656,7 +4656,7 @@
                 </a:solidFill>
                 <a:latin typeface="Montserrat" pitchFamily="2" charset="77"/>
               </a:rPr>
-              <a:t>Start your projects during busy months</a:t>
+              <a:t>Launch campaigns during high-activity months to maximize visibility.</a:t>
             </a:r>
           </a:p>
           <a:p>

--- a/Kickstarter_Project_Presentation.pptx
+++ b/Kickstarter_Project_Presentation.pptx
@@ -34,16 +34,16 @@
       <p:boldItalic r:id="rId20"/>
     </p:embeddedFont>
     <p:embeddedFont>
-      <p:font typeface="Montserrat Bold" pitchFamily="2" charset="77"/>
+      <p:font typeface="Montserrat Bold"/>
       <p:regular r:id="rId21"/>
       <p:bold r:id="rId22"/>
     </p:embeddedFont>
     <p:embeddedFont>
-      <p:font typeface="Montserrat Medium" panose="00000600000000000000" pitchFamily="2" charset="77"/>
+      <p:font typeface="Montserrat Medium" panose="00000600000000000000"/>
       <p:regular r:id="rId23"/>
     </p:embeddedFont>
     <p:embeddedFont>
-      <p:font typeface="Montserrat Semi-Bold" pitchFamily="2" charset="77"/>
+      <p:font typeface="Montserrat Semi-Bold"/>
       <p:regular r:id="rId24"/>
       <p:bold r:id="rId25"/>
     </p:embeddedFont>
@@ -244,7 +244,7 @@
           <a:p>
             <a:fld id="{E6A4C630-78AB-A64F-9D51-4F1EE13A4406}" type="datetimeFigureOut">
               <a:rPr lang="en-US" smtClean="0"/>
-              <a:t>1/30/26</a:t>
+              <a:t>2/2/26</a:t>
             </a:fld>
             <a:endParaRPr lang="en-US"/>
           </a:p>
@@ -539,6 +539,13 @@
           </p:nvPr>
         </p:nvSpPr>
         <p:spPr/>
+        <p:txBody>
+          <a:bodyPr/>
+          <a:lstStyle/>
+          <a:p>
+            <a:endParaRPr lang="en-US"/>
+          </a:p>
+        </p:txBody>
       </p:sp>
       <p:sp>
         <p:nvSpPr>
@@ -623,6 +630,674 @@
           </p:nvPr>
         </p:nvSpPr>
         <p:spPr/>
+        <p:txBody>
+          <a:bodyPr/>
+          <a:lstStyle/>
+          <a:p>
+            <a:endParaRPr lang="en-US"/>
+          </a:p>
+        </p:txBody>
+      </p:sp>
+      <p:sp>
+        <p:nvSpPr>
+          <p:cNvPr id="3" name="Notes Placeholder 2"/>
+          <p:cNvSpPr>
+            <a:spLocks noGrp="1"/>
+          </p:cNvSpPr>
+          <p:nvPr>
+            <p:ph type="body" idx="1"/>
+          </p:nvPr>
+        </p:nvSpPr>
+        <p:spPr/>
+        <p:txBody>
+          <a:bodyPr/>
+          <a:lstStyle/>
+          <a:p>
+            <a:r>
+              <a:rPr lang="en-US" dirty="0"/>
+              <a:t>Projects that needs less funding have high chances of success </a:t>
+            </a:r>
+          </a:p>
+          <a:p>
+            <a:r>
+              <a:rPr lang="en-US" dirty="0"/>
+              <a:t>Music seems to do well? I was have said food because I like food.</a:t>
+            </a:r>
+          </a:p>
+        </p:txBody>
+      </p:sp>
+      <p:sp>
+        <p:nvSpPr>
+          <p:cNvPr id="4" name="Slide Number Placeholder 3"/>
+          <p:cNvSpPr>
+            <a:spLocks noGrp="1"/>
+          </p:cNvSpPr>
+          <p:nvPr>
+            <p:ph type="sldNum" sz="quarter" idx="5"/>
+          </p:nvPr>
+        </p:nvSpPr>
+        <p:spPr/>
+        <p:txBody>
+          <a:bodyPr/>
+          <a:lstStyle/>
+          <a:p>
+            <a:fld id="{5765C2D7-9E94-2045-8E24-80DD133EE3A9}" type="slidenum">
+              <a:rPr lang="en-US" smtClean="0"/>
+              <a:t>6</a:t>
+            </a:fld>
+            <a:endParaRPr lang="en-US"/>
+          </a:p>
+        </p:txBody>
+      </p:sp>
+    </p:spTree>
+    <p:extLst>
+      <p:ext uri="{BB962C8B-B14F-4D97-AF65-F5344CB8AC3E}">
+        <p14:creationId xmlns:p14="http://schemas.microsoft.com/office/powerpoint/2010/main" val="3082415441"/>
+      </p:ext>
+    </p:extLst>
+  </p:cSld>
+  <p:clrMapOvr>
+    <a:masterClrMapping/>
+  </p:clrMapOvr>
+</p:notes>
+</file>
+
+<file path=ppt/notesSlides/notesSlide3.xml><?xml version="1.0" encoding="utf-8"?>
+<p:notes xmlns:a="http://schemas.openxmlformats.org/drawingml/2006/main" xmlns:r="http://schemas.openxmlformats.org/officeDocument/2006/relationships" xmlns:p="http://schemas.openxmlformats.org/presentationml/2006/main">
+  <p:cSld>
+    <p:spTree>
+      <p:nvGrpSpPr>
+        <p:cNvPr id="1" name=""/>
+        <p:cNvGrpSpPr/>
+        <p:nvPr/>
+      </p:nvGrpSpPr>
+      <p:grpSpPr>
+        <a:xfrm>
+          <a:off x="0" y="0"/>
+          <a:ext cx="0" cy="0"/>
+          <a:chOff x="0" y="0"/>
+          <a:chExt cx="0" cy="0"/>
+        </a:xfrm>
+      </p:grpSpPr>
+      <p:sp>
+        <p:nvSpPr>
+          <p:cNvPr id="2" name="Slide Image Placeholder 1"/>
+          <p:cNvSpPr>
+            <a:spLocks noGrp="1" noRot="1" noChangeAspect="1"/>
+          </p:cNvSpPr>
+          <p:nvPr>
+            <p:ph type="sldImg"/>
+          </p:nvPr>
+        </p:nvSpPr>
+        <p:spPr/>
+        <p:txBody>
+          <a:bodyPr/>
+          <a:lstStyle/>
+          <a:p>
+            <a:endParaRPr lang="en-US"/>
+          </a:p>
+        </p:txBody>
+      </p:sp>
+      <p:sp>
+        <p:nvSpPr>
+          <p:cNvPr id="3" name="Notes Placeholder 2"/>
+          <p:cNvSpPr>
+            <a:spLocks noGrp="1"/>
+          </p:cNvSpPr>
+          <p:nvPr>
+            <p:ph type="body" idx="1"/>
+          </p:nvPr>
+        </p:nvSpPr>
+        <p:spPr/>
+        <p:txBody>
+          <a:bodyPr/>
+          <a:lstStyle/>
+          <a:p>
+            <a:pPr marL="0" marR="0" lvl="0" indent="0" algn="l" defTabSz="914400" rtl="0" eaLnBrk="1" fontAlgn="auto" latinLnBrk="0" hangingPunct="1">
+              <a:lnSpc>
+                <a:spcPct val="100000"/>
+              </a:lnSpc>
+              <a:spcBef>
+                <a:spcPts val="0"/>
+              </a:spcBef>
+              <a:spcAft>
+                <a:spcPts val="0"/>
+              </a:spcAft>
+              <a:buClrTx/>
+              <a:buSzTx/>
+              <a:buFontTx/>
+              <a:buNone/>
+              <a:tabLst/>
+              <a:defRPr/>
+            </a:pPr>
+            <a:r>
+              <a:rPr lang="en-US" sz="1200" kern="1200" dirty="0">
+                <a:solidFill>
+                  <a:schemeClr val="tx1"/>
+                </a:solidFill>
+                <a:effectLst/>
+                <a:latin typeface="+mn-lt"/>
+                <a:ea typeface="+mn-ea"/>
+                <a:cs typeface="+mn-cs"/>
+              </a:rPr>
+              <a:t>These communities are passionate, tightly connected, and extremely supportive.</a:t>
+            </a:r>
+          </a:p>
+          <a:p>
+            <a:endParaRPr lang="en-US" dirty="0"/>
+          </a:p>
+        </p:txBody>
+      </p:sp>
+      <p:sp>
+        <p:nvSpPr>
+          <p:cNvPr id="4" name="Slide Number Placeholder 3"/>
+          <p:cNvSpPr>
+            <a:spLocks noGrp="1"/>
+          </p:cNvSpPr>
+          <p:nvPr>
+            <p:ph type="sldNum" sz="quarter" idx="5"/>
+          </p:nvPr>
+        </p:nvSpPr>
+        <p:spPr/>
+        <p:txBody>
+          <a:bodyPr/>
+          <a:lstStyle/>
+          <a:p>
+            <a:fld id="{5765C2D7-9E94-2045-8E24-80DD133EE3A9}" type="slidenum">
+              <a:rPr lang="en-US" smtClean="0"/>
+              <a:t>7</a:t>
+            </a:fld>
+            <a:endParaRPr lang="en-US"/>
+          </a:p>
+        </p:txBody>
+      </p:sp>
+    </p:spTree>
+    <p:extLst>
+      <p:ext uri="{BB962C8B-B14F-4D97-AF65-F5344CB8AC3E}">
+        <p14:creationId xmlns:p14="http://schemas.microsoft.com/office/powerpoint/2010/main" val="529816248"/>
+      </p:ext>
+    </p:extLst>
+  </p:cSld>
+  <p:clrMapOvr>
+    <a:masterClrMapping/>
+  </p:clrMapOvr>
+</p:notes>
+</file>
+
+<file path=ppt/notesSlides/notesSlide4.xml><?xml version="1.0" encoding="utf-8"?>
+<p:notes xmlns:a="http://schemas.openxmlformats.org/drawingml/2006/main" xmlns:r="http://schemas.openxmlformats.org/officeDocument/2006/relationships" xmlns:p="http://schemas.openxmlformats.org/presentationml/2006/main">
+  <p:cSld>
+    <p:spTree>
+      <p:nvGrpSpPr>
+        <p:cNvPr id="1" name=""/>
+        <p:cNvGrpSpPr/>
+        <p:nvPr/>
+      </p:nvGrpSpPr>
+      <p:grpSpPr>
+        <a:xfrm>
+          <a:off x="0" y="0"/>
+          <a:ext cx="0" cy="0"/>
+          <a:chOff x="0" y="0"/>
+          <a:chExt cx="0" cy="0"/>
+        </a:xfrm>
+      </p:grpSpPr>
+      <p:sp>
+        <p:nvSpPr>
+          <p:cNvPr id="2" name="Slide Image Placeholder 1"/>
+          <p:cNvSpPr>
+            <a:spLocks noGrp="1" noRot="1" noChangeAspect="1"/>
+          </p:cNvSpPr>
+          <p:nvPr>
+            <p:ph type="sldImg"/>
+          </p:nvPr>
+        </p:nvSpPr>
+        <p:spPr/>
+        <p:txBody>
+          <a:bodyPr/>
+          <a:lstStyle/>
+          <a:p>
+            <a:endParaRPr lang="en-US"/>
+          </a:p>
+        </p:txBody>
+      </p:sp>
+      <p:sp>
+        <p:nvSpPr>
+          <p:cNvPr id="3" name="Notes Placeholder 2"/>
+          <p:cNvSpPr>
+            <a:spLocks noGrp="1"/>
+          </p:cNvSpPr>
+          <p:nvPr>
+            <p:ph type="body" idx="1"/>
+          </p:nvPr>
+        </p:nvSpPr>
+        <p:spPr/>
+        <p:txBody>
+          <a:bodyPr/>
+          <a:lstStyle/>
+          <a:p>
+            <a:pPr marL="0" marR="0" lvl="0" indent="0" algn="l" defTabSz="914400" rtl="0" eaLnBrk="1" fontAlgn="auto" latinLnBrk="0" hangingPunct="1">
+              <a:lnSpc>
+                <a:spcPct val="100000"/>
+              </a:lnSpc>
+              <a:spcBef>
+                <a:spcPts val="0"/>
+              </a:spcBef>
+              <a:spcAft>
+                <a:spcPts val="0"/>
+              </a:spcAft>
+              <a:buClrTx/>
+              <a:buSzTx/>
+              <a:buFontTx/>
+              <a:buNone/>
+              <a:tabLst/>
+              <a:defRPr/>
+            </a:pPr>
+            <a:r>
+              <a:rPr lang="en-US" sz="1200" b="1" kern="1200" dirty="0">
+                <a:solidFill>
+                  <a:schemeClr val="tx1"/>
+                </a:solidFill>
+                <a:effectLst/>
+                <a:latin typeface="+mn-lt"/>
+                <a:ea typeface="+mn-ea"/>
+                <a:cs typeface="+mn-cs"/>
+              </a:rPr>
+              <a:t>General view: Projects launched in the U.S. and the U.K. are almost twice as likely to succeed as projects launched in Italy.</a:t>
+            </a:r>
+          </a:p>
+          <a:p>
+            <a:pPr marL="0" marR="0" lvl="0" indent="0" algn="l" defTabSz="914400" rtl="0" eaLnBrk="1" fontAlgn="auto" latinLnBrk="0" hangingPunct="1">
+              <a:lnSpc>
+                <a:spcPct val="100000"/>
+              </a:lnSpc>
+              <a:spcBef>
+                <a:spcPts val="0"/>
+              </a:spcBef>
+              <a:spcAft>
+                <a:spcPts val="0"/>
+              </a:spcAft>
+              <a:buClrTx/>
+              <a:buSzTx/>
+              <a:buFontTx/>
+              <a:buNone/>
+              <a:tabLst/>
+              <a:defRPr/>
+            </a:pPr>
+            <a:r>
+              <a:rPr lang="en-US" sz="1200" b="1" kern="1200" dirty="0">
+                <a:solidFill>
+                  <a:schemeClr val="tx1"/>
+                </a:solidFill>
+                <a:effectLst/>
+                <a:latin typeface="+mn-lt"/>
+                <a:ea typeface="+mn-ea"/>
+                <a:cs typeface="+mn-cs"/>
+              </a:rPr>
+              <a:t>If the project category  are some like, dance, theater, something the community are passionate, connected with and can support </a:t>
+            </a:r>
+            <a:endParaRPr lang="en-US" sz="1200" kern="1200" dirty="0">
+              <a:solidFill>
+                <a:schemeClr val="tx1"/>
+              </a:solidFill>
+              <a:effectLst/>
+              <a:latin typeface="+mn-lt"/>
+              <a:ea typeface="+mn-ea"/>
+              <a:cs typeface="+mn-cs"/>
+            </a:endParaRPr>
+          </a:p>
+          <a:p>
+            <a:endParaRPr lang="en-US" dirty="0"/>
+          </a:p>
+        </p:txBody>
+      </p:sp>
+      <p:sp>
+        <p:nvSpPr>
+          <p:cNvPr id="4" name="Slide Number Placeholder 3"/>
+          <p:cNvSpPr>
+            <a:spLocks noGrp="1"/>
+          </p:cNvSpPr>
+          <p:nvPr>
+            <p:ph type="sldNum" sz="quarter" idx="5"/>
+          </p:nvPr>
+        </p:nvSpPr>
+        <p:spPr/>
+        <p:txBody>
+          <a:bodyPr/>
+          <a:lstStyle/>
+          <a:p>
+            <a:fld id="{5765C2D7-9E94-2045-8E24-80DD133EE3A9}" type="slidenum">
+              <a:rPr lang="en-US" smtClean="0"/>
+              <a:t>8</a:t>
+            </a:fld>
+            <a:endParaRPr lang="en-US"/>
+          </a:p>
+        </p:txBody>
+      </p:sp>
+    </p:spTree>
+    <p:extLst>
+      <p:ext uri="{BB962C8B-B14F-4D97-AF65-F5344CB8AC3E}">
+        <p14:creationId xmlns:p14="http://schemas.microsoft.com/office/powerpoint/2010/main" val="2075123421"/>
+      </p:ext>
+    </p:extLst>
+  </p:cSld>
+  <p:clrMapOvr>
+    <a:masterClrMapping/>
+  </p:clrMapOvr>
+</p:notes>
+</file>
+
+<file path=ppt/notesSlides/notesSlide5.xml><?xml version="1.0" encoding="utf-8"?>
+<p:notes xmlns:a="http://schemas.openxmlformats.org/drawingml/2006/main" xmlns:r="http://schemas.openxmlformats.org/officeDocument/2006/relationships" xmlns:p="http://schemas.openxmlformats.org/presentationml/2006/main">
+  <p:cSld>
+    <p:spTree>
+      <p:nvGrpSpPr>
+        <p:cNvPr id="1" name=""/>
+        <p:cNvGrpSpPr/>
+        <p:nvPr/>
+      </p:nvGrpSpPr>
+      <p:grpSpPr>
+        <a:xfrm>
+          <a:off x="0" y="0"/>
+          <a:ext cx="0" cy="0"/>
+          <a:chOff x="0" y="0"/>
+          <a:chExt cx="0" cy="0"/>
+        </a:xfrm>
+      </p:grpSpPr>
+      <p:sp>
+        <p:nvSpPr>
+          <p:cNvPr id="2" name="Slide Image Placeholder 1"/>
+          <p:cNvSpPr>
+            <a:spLocks noGrp="1" noRot="1" noChangeAspect="1"/>
+          </p:cNvSpPr>
+          <p:nvPr>
+            <p:ph type="sldImg"/>
+          </p:nvPr>
+        </p:nvSpPr>
+        <p:spPr/>
+        <p:txBody>
+          <a:bodyPr/>
+          <a:lstStyle/>
+          <a:p>
+            <a:endParaRPr lang="en-US"/>
+          </a:p>
+        </p:txBody>
+      </p:sp>
+      <p:sp>
+        <p:nvSpPr>
+          <p:cNvPr id="3" name="Notes Placeholder 2"/>
+          <p:cNvSpPr>
+            <a:spLocks noGrp="1"/>
+          </p:cNvSpPr>
+          <p:nvPr>
+            <p:ph type="body" idx="1"/>
+          </p:nvPr>
+        </p:nvSpPr>
+        <p:spPr/>
+        <p:txBody>
+          <a:bodyPr/>
+          <a:lstStyle/>
+          <a:p>
+            <a:endParaRPr lang="en-US" dirty="0"/>
+          </a:p>
+        </p:txBody>
+      </p:sp>
+      <p:sp>
+        <p:nvSpPr>
+          <p:cNvPr id="4" name="Slide Number Placeholder 3"/>
+          <p:cNvSpPr>
+            <a:spLocks noGrp="1"/>
+          </p:cNvSpPr>
+          <p:nvPr>
+            <p:ph type="sldNum" sz="quarter" idx="5"/>
+          </p:nvPr>
+        </p:nvSpPr>
+        <p:spPr/>
+        <p:txBody>
+          <a:bodyPr/>
+          <a:lstStyle/>
+          <a:p>
+            <a:fld id="{5765C2D7-9E94-2045-8E24-80DD133EE3A9}" type="slidenum">
+              <a:rPr lang="en-US" smtClean="0"/>
+              <a:t>9</a:t>
+            </a:fld>
+            <a:endParaRPr lang="en-US"/>
+          </a:p>
+        </p:txBody>
+      </p:sp>
+    </p:spTree>
+    <p:extLst>
+      <p:ext uri="{BB962C8B-B14F-4D97-AF65-F5344CB8AC3E}">
+        <p14:creationId xmlns:p14="http://schemas.microsoft.com/office/powerpoint/2010/main" val="1903010725"/>
+      </p:ext>
+    </p:extLst>
+  </p:cSld>
+  <p:clrMapOvr>
+    <a:masterClrMapping/>
+  </p:clrMapOvr>
+</p:notes>
+</file>
+
+<file path=ppt/notesSlides/notesSlide6.xml><?xml version="1.0" encoding="utf-8"?>
+<p:notes xmlns:a="http://schemas.openxmlformats.org/drawingml/2006/main" xmlns:r="http://schemas.openxmlformats.org/officeDocument/2006/relationships" xmlns:p="http://schemas.openxmlformats.org/presentationml/2006/main">
+  <p:cSld>
+    <p:spTree>
+      <p:nvGrpSpPr>
+        <p:cNvPr id="1" name=""/>
+        <p:cNvGrpSpPr/>
+        <p:nvPr/>
+      </p:nvGrpSpPr>
+      <p:grpSpPr>
+        <a:xfrm>
+          <a:off x="0" y="0"/>
+          <a:ext cx="0" cy="0"/>
+          <a:chOff x="0" y="0"/>
+          <a:chExt cx="0" cy="0"/>
+        </a:xfrm>
+      </p:grpSpPr>
+      <p:sp>
+        <p:nvSpPr>
+          <p:cNvPr id="2" name="Slide Image Placeholder 1"/>
+          <p:cNvSpPr>
+            <a:spLocks noGrp="1" noRot="1" noChangeAspect="1"/>
+          </p:cNvSpPr>
+          <p:nvPr>
+            <p:ph type="sldImg"/>
+          </p:nvPr>
+        </p:nvSpPr>
+        <p:spPr/>
+        <p:txBody>
+          <a:bodyPr/>
+          <a:lstStyle/>
+          <a:p>
+            <a:endParaRPr lang="en-US"/>
+          </a:p>
+        </p:txBody>
+      </p:sp>
+      <p:sp>
+        <p:nvSpPr>
+          <p:cNvPr id="3" name="Notes Placeholder 2"/>
+          <p:cNvSpPr>
+            <a:spLocks noGrp="1"/>
+          </p:cNvSpPr>
+          <p:nvPr>
+            <p:ph type="body" idx="1"/>
+          </p:nvPr>
+        </p:nvSpPr>
+        <p:spPr/>
+        <p:txBody>
+          <a:bodyPr/>
+          <a:lstStyle/>
+          <a:p>
+            <a:r>
+              <a:rPr lang="en-US" dirty="0"/>
+              <a:t>The more you have high numbers of people that </a:t>
+            </a:r>
+            <a:r>
+              <a:rPr lang="en-US" b="1" dirty="0"/>
+              <a:t>pledge </a:t>
+            </a:r>
+            <a:r>
+              <a:rPr lang="en-US" b="0" dirty="0"/>
+              <a:t>(money) the higher chance the project happens, if the goal of the project is reached only then is money  </a:t>
+            </a:r>
+          </a:p>
+          <a:p>
+            <a:pPr marL="0" marR="0" lvl="0" indent="0" algn="l" defTabSz="914400" rtl="0" eaLnBrk="1" fontAlgn="auto" latinLnBrk="0" hangingPunct="1">
+              <a:lnSpc>
+                <a:spcPct val="100000"/>
+              </a:lnSpc>
+              <a:spcBef>
+                <a:spcPts val="0"/>
+              </a:spcBef>
+              <a:spcAft>
+                <a:spcPts val="0"/>
+              </a:spcAft>
+              <a:buClrTx/>
+              <a:buSzTx/>
+              <a:buFontTx/>
+              <a:buNone/>
+              <a:tabLst/>
+              <a:defRPr/>
+            </a:pPr>
+            <a:r>
+              <a:rPr lang="en-US" b="0" dirty="0"/>
+              <a:t>Backers, the </a:t>
+            </a:r>
+            <a:r>
+              <a:rPr lang="en-US" sz="1200" b="0" kern="1200" dirty="0">
+                <a:solidFill>
+                  <a:schemeClr val="tx1"/>
+                </a:solidFill>
+                <a:effectLst/>
+                <a:latin typeface="+mn-lt"/>
+                <a:ea typeface="+mn-ea"/>
+                <a:cs typeface="+mn-cs"/>
+              </a:rPr>
+              <a:t>number of supporters aka backers are people give towards the project, more like friends and family and people who genuinely believe the project </a:t>
+            </a:r>
+          </a:p>
+          <a:p>
+            <a:pPr marL="0" marR="0" lvl="0" indent="0" algn="l" defTabSz="914400" rtl="0" eaLnBrk="1" fontAlgn="auto" latinLnBrk="0" hangingPunct="1">
+              <a:lnSpc>
+                <a:spcPct val="100000"/>
+              </a:lnSpc>
+              <a:spcBef>
+                <a:spcPts val="0"/>
+              </a:spcBef>
+              <a:spcAft>
+                <a:spcPts val="0"/>
+              </a:spcAft>
+              <a:buClrTx/>
+              <a:buSzTx/>
+              <a:buFontTx/>
+              <a:buNone/>
+              <a:tabLst/>
+              <a:defRPr/>
+            </a:pPr>
+            <a:r>
+              <a:rPr lang="en-US" sz="1200" b="0" kern="1200" dirty="0">
+                <a:solidFill>
+                  <a:schemeClr val="tx1"/>
+                </a:solidFill>
+                <a:effectLst/>
+                <a:latin typeface="+mn-lt"/>
+                <a:ea typeface="+mn-ea"/>
+                <a:cs typeface="+mn-cs"/>
+              </a:rPr>
+              <a:t>Funded_ratio": "Funding Achieved (%), which  goal / pledge</a:t>
+            </a:r>
+            <a:endParaRPr lang="en-US" b="0" dirty="0"/>
+          </a:p>
+          <a:p>
+            <a:r>
+              <a:rPr lang="en-US" sz="1200" b="0" kern="1200" dirty="0">
+                <a:solidFill>
+                  <a:schemeClr val="tx1"/>
+                </a:solidFill>
+                <a:effectLst/>
+                <a:latin typeface="+mn-lt"/>
+                <a:ea typeface="+mn-ea"/>
+                <a:cs typeface="+mn-cs"/>
+              </a:rPr>
+              <a:t>goal: Amount Requested  if you request for a fund that its attainable </a:t>
+            </a:r>
+          </a:p>
+          <a:p>
+            <a:endParaRPr lang="en-US" b="0" dirty="0"/>
+          </a:p>
+        </p:txBody>
+      </p:sp>
+      <p:sp>
+        <p:nvSpPr>
+          <p:cNvPr id="4" name="Slide Number Placeholder 3"/>
+          <p:cNvSpPr>
+            <a:spLocks noGrp="1"/>
+          </p:cNvSpPr>
+          <p:nvPr>
+            <p:ph type="sldNum" sz="quarter" idx="5"/>
+          </p:nvPr>
+        </p:nvSpPr>
+        <p:spPr/>
+        <p:txBody>
+          <a:bodyPr/>
+          <a:lstStyle/>
+          <a:p>
+            <a:fld id="{5765C2D7-9E94-2045-8E24-80DD133EE3A9}" type="slidenum">
+              <a:rPr lang="en-US" smtClean="0"/>
+              <a:t>10</a:t>
+            </a:fld>
+            <a:endParaRPr lang="en-US"/>
+          </a:p>
+        </p:txBody>
+      </p:sp>
+    </p:spTree>
+    <p:extLst>
+      <p:ext uri="{BB962C8B-B14F-4D97-AF65-F5344CB8AC3E}">
+        <p14:creationId xmlns:p14="http://schemas.microsoft.com/office/powerpoint/2010/main" val="3409728136"/>
+      </p:ext>
+    </p:extLst>
+  </p:cSld>
+  <p:clrMapOvr>
+    <a:masterClrMapping/>
+  </p:clrMapOvr>
+</p:notes>
+</file>
+
+<file path=ppt/notesSlides/notesSlide7.xml><?xml version="1.0" encoding="utf-8"?>
+<p:notes xmlns:a="http://schemas.openxmlformats.org/drawingml/2006/main" xmlns:r="http://schemas.openxmlformats.org/officeDocument/2006/relationships" xmlns:p="http://schemas.openxmlformats.org/presentationml/2006/main">
+  <p:cSld>
+    <p:spTree>
+      <p:nvGrpSpPr>
+        <p:cNvPr id="1" name=""/>
+        <p:cNvGrpSpPr/>
+        <p:nvPr/>
+      </p:nvGrpSpPr>
+      <p:grpSpPr>
+        <a:xfrm>
+          <a:off x="0" y="0"/>
+          <a:ext cx="0" cy="0"/>
+          <a:chOff x="0" y="0"/>
+          <a:chExt cx="0" cy="0"/>
+        </a:xfrm>
+      </p:grpSpPr>
+      <p:sp>
+        <p:nvSpPr>
+          <p:cNvPr id="2" name="Slide Image Placeholder 1"/>
+          <p:cNvSpPr>
+            <a:spLocks noGrp="1" noRot="1" noChangeAspect="1"/>
+          </p:cNvSpPr>
+          <p:nvPr>
+            <p:ph type="sldImg"/>
+          </p:nvPr>
+        </p:nvSpPr>
+        <p:spPr/>
+        <p:txBody>
+          <a:bodyPr/>
+          <a:lstStyle/>
+          <a:p>
+            <a:endParaRPr lang="en-US"/>
+          </a:p>
+        </p:txBody>
       </p:sp>
       <p:sp>
         <p:nvSpPr>
@@ -859,7 +1534,7 @@
             <a:fld id="{1D8BD707-D9CF-40AE-B4C6-C98DA3205C09}" type="datetimeFigureOut">
               <a:rPr lang="en-US" smtClean="0"/>
               <a:pPr/>
-              <a:t>1/30/26</a:t>
+              <a:t>2/2/26</a:t>
             </a:fld>
             <a:endParaRPr lang="en-US"/>
           </a:p>
@@ -1024,7 +1699,7 @@
             <a:fld id="{1D8BD707-D9CF-40AE-B4C6-C98DA3205C09}" type="datetimeFigureOut">
               <a:rPr lang="en-US" smtClean="0"/>
               <a:pPr/>
-              <a:t>1/30/26</a:t>
+              <a:t>2/2/26</a:t>
             </a:fld>
             <a:endParaRPr lang="en-US"/>
           </a:p>
@@ -1199,7 +1874,7 @@
             <a:fld id="{1D8BD707-D9CF-40AE-B4C6-C98DA3205C09}" type="datetimeFigureOut">
               <a:rPr lang="en-US" smtClean="0"/>
               <a:pPr/>
-              <a:t>1/30/26</a:t>
+              <a:t>2/2/26</a:t>
             </a:fld>
             <a:endParaRPr lang="en-US"/>
           </a:p>
@@ -1364,7 +2039,7 @@
             <a:fld id="{1D8BD707-D9CF-40AE-B4C6-C98DA3205C09}" type="datetimeFigureOut">
               <a:rPr lang="en-US" smtClean="0"/>
               <a:pPr/>
-              <a:t>1/30/26</a:t>
+              <a:t>2/2/26</a:t>
             </a:fld>
             <a:endParaRPr lang="en-US"/>
           </a:p>
@@ -1606,7 +2281,7 @@
             <a:fld id="{1D8BD707-D9CF-40AE-B4C6-C98DA3205C09}" type="datetimeFigureOut">
               <a:rPr lang="en-US" smtClean="0"/>
               <a:pPr/>
-              <a:t>1/30/26</a:t>
+              <a:t>2/2/26</a:t>
             </a:fld>
             <a:endParaRPr lang="en-US"/>
           </a:p>
@@ -1888,7 +2563,7 @@
             <a:fld id="{1D8BD707-D9CF-40AE-B4C6-C98DA3205C09}" type="datetimeFigureOut">
               <a:rPr lang="en-US" smtClean="0"/>
               <a:pPr/>
-              <a:t>1/30/26</a:t>
+              <a:t>2/2/26</a:t>
             </a:fld>
             <a:endParaRPr lang="en-US"/>
           </a:p>
@@ -2304,7 +2979,7 @@
             <a:fld id="{1D8BD707-D9CF-40AE-B4C6-C98DA3205C09}" type="datetimeFigureOut">
               <a:rPr lang="en-US" smtClean="0"/>
               <a:pPr/>
-              <a:t>1/30/26</a:t>
+              <a:t>2/2/26</a:t>
             </a:fld>
             <a:endParaRPr lang="en-US"/>
           </a:p>
@@ -2418,7 +3093,7 @@
             <a:fld id="{1D8BD707-D9CF-40AE-B4C6-C98DA3205C09}" type="datetimeFigureOut">
               <a:rPr lang="en-US" smtClean="0"/>
               <a:pPr/>
-              <a:t>1/30/26</a:t>
+              <a:t>2/2/26</a:t>
             </a:fld>
             <a:endParaRPr lang="en-US"/>
           </a:p>
@@ -2510,7 +3185,7 @@
             <a:fld id="{1D8BD707-D9CF-40AE-B4C6-C98DA3205C09}" type="datetimeFigureOut">
               <a:rPr lang="en-US" smtClean="0"/>
               <a:pPr/>
-              <a:t>1/30/26</a:t>
+              <a:t>2/2/26</a:t>
             </a:fld>
             <a:endParaRPr lang="en-US"/>
           </a:p>
@@ -2782,7 +3457,7 @@
             <a:fld id="{1D8BD707-D9CF-40AE-B4C6-C98DA3205C09}" type="datetimeFigureOut">
               <a:rPr lang="en-US" smtClean="0"/>
               <a:pPr/>
-              <a:t>1/30/26</a:t>
+              <a:t>2/2/26</a:t>
             </a:fld>
             <a:endParaRPr lang="en-US"/>
           </a:p>
@@ -3031,7 +3706,7 @@
             <a:fld id="{1D8BD707-D9CF-40AE-B4C6-C98DA3205C09}" type="datetimeFigureOut">
               <a:rPr lang="en-US" smtClean="0"/>
               <a:pPr/>
-              <a:t>1/30/26</a:t>
+              <a:t>2/2/26</a:t>
             </a:fld>
             <a:endParaRPr lang="en-US"/>
           </a:p>
@@ -3239,7 +3914,7 @@
             <a:fld id="{1D8BD707-D9CF-40AE-B4C6-C98DA3205C09}" type="datetimeFigureOut">
               <a:rPr lang="en-US" smtClean="0"/>
               <a:pPr/>
-              <a:t>1/30/26</a:t>
+              <a:t>2/2/26</a:t>
             </a:fld>
             <a:endParaRPr lang="en-US"/>
           </a:p>
@@ -4140,7 +4815,7 @@
           <p:nvPr/>
         </p:nvPicPr>
         <p:blipFill>
-          <a:blip r:embed="rId2">
+          <a:blip r:embed="rId3">
             <a:extLst>
               <a:ext uri="{28A0092B-C50C-407E-A947-70E740481C1C}">
                 <a14:useLocalDpi xmlns:a14="http://schemas.microsoft.com/office/drawing/2010/main" val="0"/>
@@ -5066,7 +5741,7 @@
         </p:nvSpPr>
         <p:spPr>
           <a:xfrm flipV="1">
-            <a:off x="-2489528" y="-777856"/>
+            <a:off x="-2489528" y="-768331"/>
             <a:ext cx="8389173" cy="11064856"/>
           </a:xfrm>
           <a:custGeom>
@@ -6612,7 +7287,7 @@
           <p:nvPr/>
         </p:nvPicPr>
         <p:blipFill>
-          <a:blip r:embed="rId2">
+          <a:blip r:embed="rId3">
             <a:extLst>
               <a:ext uri="{28A0092B-C50C-407E-A947-70E740481C1C}">
                 <a14:useLocalDpi xmlns:a14="http://schemas.microsoft.com/office/drawing/2010/main" val="0"/>
@@ -6767,7 +7442,7 @@
           <p:nvPr/>
         </p:nvPicPr>
         <p:blipFill>
-          <a:blip r:embed="rId2">
+          <a:blip r:embed="rId3">
             <a:extLst>
               <a:ext uri="{28A0092B-C50C-407E-A947-70E740481C1C}">
                 <a14:useLocalDpi xmlns:a14="http://schemas.microsoft.com/office/drawing/2010/main" val="0"/>
@@ -6922,7 +7597,7 @@
           <p:nvPr/>
         </p:nvPicPr>
         <p:blipFill>
-          <a:blip r:embed="rId2">
+          <a:blip r:embed="rId3">
             <a:extLst>
               <a:ext uri="{28A0092B-C50C-407E-A947-70E740481C1C}">
                 <a14:useLocalDpi xmlns:a14="http://schemas.microsoft.com/office/drawing/2010/main" val="0"/>
@@ -7085,7 +7760,7 @@
           <p:nvPr/>
         </p:nvPicPr>
         <p:blipFill>
-          <a:blip r:embed="rId2">
+          <a:blip r:embed="rId3">
             <a:extLst>
               <a:ext uri="{28A0092B-C50C-407E-A947-70E740481C1C}">
                 <a14:useLocalDpi xmlns:a14="http://schemas.microsoft.com/office/drawing/2010/main" val="0"/>
